--- a/files/meta-teaching/Lecture4.pptx
+++ b/files/meta-teaching/Lecture4.pptx
@@ -6,7 +6,7 @@
     <p:sldMasterId id="2147483662" r:id="rId2"/>
   </p:sldMasterIdLst>
   <p:notesMasterIdLst>
-    <p:notesMasterId r:id="rId34"/>
+    <p:notesMasterId r:id="rId37"/>
   </p:notesMasterIdLst>
   <p:sldIdLst>
     <p:sldId id="283" r:id="rId3"/>
@@ -39,12 +39,15 @@
     <p:sldId id="374" r:id="rId30"/>
     <p:sldId id="375" r:id="rId31"/>
     <p:sldId id="352" r:id="rId32"/>
-    <p:sldId id="303" r:id="rId33"/>
+    <p:sldId id="376" r:id="rId33"/>
+    <p:sldId id="377" r:id="rId34"/>
+    <p:sldId id="378" r:id="rId35"/>
+    <p:sldId id="303" r:id="rId36"/>
   </p:sldIdLst>
   <p:sldSz cx="12192000" cy="6858000"/>
   <p:notesSz cx="6858000" cy="9144000"/>
   <p:custDataLst>
-    <p:tags r:id="rId35"/>
+    <p:tags r:id="rId38"/>
   </p:custDataLst>
   <p:defaultTextStyle>
     <a:defPPr>
@@ -242,7 +245,7 @@
           <a:p>
             <a:fld id="{9F6D67DF-CF82-44E4-9FB6-564B8C4C207B}" type="datetimeFigureOut">
               <a:rPr lang="zh-CN" altLang="en-US" smtClean="0"/>
-              <a:t>2024/5/22</a:t>
+              <a:t>2024/8/22</a:t>
             </a:fld>
             <a:endParaRPr lang="zh-CN" altLang="en-US"/>
           </a:p>
@@ -2596,7 +2599,91 @@
           <a:p>
             <a:fld id="{7E79BF44-F5CE-455C-A9FE-73A15FC422D4}" type="slidenum">
               <a:rPr lang="zh-CN" altLang="en-US" smtClean="0"/>
-              <a:t>31</a:t>
+              <a:t>32</a:t>
+            </a:fld>
+            <a:endParaRPr lang="zh-CN" altLang="en-US"/>
+          </a:p>
+        </p:txBody>
+      </p:sp>
+    </p:spTree>
+    <p:extLst>
+      <p:ext uri="{BB962C8B-B14F-4D97-AF65-F5344CB8AC3E}">
+        <p14:creationId xmlns:p14="http://schemas.microsoft.com/office/powerpoint/2010/main" val="1709401028"/>
+      </p:ext>
+    </p:extLst>
+  </p:cSld>
+  <p:clrMapOvr>
+    <a:masterClrMapping/>
+  </p:clrMapOvr>
+</p:notes>
+</file>
+
+<file path=ppt/notesSlides/notesSlide31.xml><?xml version="1.0" encoding="utf-8"?>
+<p:notes xmlns:a="http://schemas.openxmlformats.org/drawingml/2006/main" xmlns:r="http://schemas.openxmlformats.org/officeDocument/2006/relationships" xmlns:p="http://schemas.openxmlformats.org/presentationml/2006/main">
+  <p:cSld>
+    <p:spTree>
+      <p:nvGrpSpPr>
+        <p:cNvPr id="1" name=""/>
+        <p:cNvGrpSpPr/>
+        <p:nvPr/>
+      </p:nvGrpSpPr>
+      <p:grpSpPr>
+        <a:xfrm>
+          <a:off x="0" y="0"/>
+          <a:ext cx="0" cy="0"/>
+          <a:chOff x="0" y="0"/>
+          <a:chExt cx="0" cy="0"/>
+        </a:xfrm>
+      </p:grpSpPr>
+      <p:sp>
+        <p:nvSpPr>
+          <p:cNvPr id="2" name="幻灯片图像占位符 1"/>
+          <p:cNvSpPr>
+            <a:spLocks noGrp="1" noRot="1" noChangeAspect="1"/>
+          </p:cNvSpPr>
+          <p:nvPr>
+            <p:ph type="sldImg"/>
+          </p:nvPr>
+        </p:nvSpPr>
+        <p:spPr/>
+      </p:sp>
+      <p:sp>
+        <p:nvSpPr>
+          <p:cNvPr id="3" name="备注占位符 2"/>
+          <p:cNvSpPr>
+            <a:spLocks noGrp="1"/>
+          </p:cNvSpPr>
+          <p:nvPr>
+            <p:ph type="body" idx="1"/>
+          </p:nvPr>
+        </p:nvSpPr>
+        <p:spPr/>
+        <p:txBody>
+          <a:bodyPr/>
+          <a:lstStyle/>
+          <a:p>
+            <a:endParaRPr lang="zh-CN" altLang="en-US"/>
+          </a:p>
+        </p:txBody>
+      </p:sp>
+      <p:sp>
+        <p:nvSpPr>
+          <p:cNvPr id="4" name="灯片编号占位符 3"/>
+          <p:cNvSpPr>
+            <a:spLocks noGrp="1"/>
+          </p:cNvSpPr>
+          <p:nvPr>
+            <p:ph type="sldNum" sz="quarter" idx="10"/>
+          </p:nvPr>
+        </p:nvSpPr>
+        <p:spPr/>
+        <p:txBody>
+          <a:bodyPr/>
+          <a:lstStyle/>
+          <a:p>
+            <a:fld id="{7E79BF44-F5CE-455C-A9FE-73A15FC422D4}" type="slidenum">
+              <a:rPr lang="zh-CN" altLang="en-US" smtClean="0"/>
+              <a:t>34</a:t>
             </a:fld>
             <a:endParaRPr lang="zh-CN" altLang="en-US"/>
           </a:p>
@@ -3291,7 +3378,7 @@
           <a:p>
             <a:fld id="{C18EDF5E-578C-4F7F-BA8F-EE7896D35C60}" type="datetimeFigureOut">
               <a:rPr lang="zh-CN" altLang="en-US" smtClean="0"/>
-              <a:t>2024/5/22</a:t>
+              <a:t>2024/8/22</a:t>
             </a:fld>
             <a:endParaRPr lang="zh-CN" altLang="en-US"/>
           </a:p>
@@ -3591,7 +3678,7 @@
           <a:p>
             <a:fld id="{C18EDF5E-578C-4F7F-BA8F-EE7896D35C60}" type="datetimeFigureOut">
               <a:rPr lang="zh-CN" altLang="en-US" smtClean="0"/>
-              <a:t>2024/5/22</a:t>
+              <a:t>2024/8/22</a:t>
             </a:fld>
             <a:endParaRPr lang="zh-CN" altLang="en-US"/>
           </a:p>
@@ -3801,7 +3888,7 @@
           <a:p>
             <a:fld id="{C18EDF5E-578C-4F7F-BA8F-EE7896D35C60}" type="datetimeFigureOut">
               <a:rPr lang="zh-CN" altLang="en-US" smtClean="0"/>
-              <a:t>2024/5/22</a:t>
+              <a:t>2024/8/22</a:t>
             </a:fld>
             <a:endParaRPr lang="zh-CN" altLang="en-US"/>
           </a:p>
@@ -4021,7 +4108,7 @@
           <a:p>
             <a:fld id="{C18EDF5E-578C-4F7F-BA8F-EE7896D35C60}" type="datetimeFigureOut">
               <a:rPr lang="zh-CN" altLang="en-US" smtClean="0"/>
-              <a:t>2024/5/22</a:t>
+              <a:t>2024/8/22</a:t>
             </a:fld>
             <a:endParaRPr lang="zh-CN" altLang="en-US"/>
           </a:p>
@@ -4140,7 +4227,7 @@
           <a:p>
             <a:fld id="{D67E1CCE-4C69-481E-8A82-8C3A41A945F4}" type="datetimeFigureOut">
               <a:rPr lang="zh-CN" altLang="en-US" smtClean="0"/>
-              <a:t>2024/5/22</a:t>
+              <a:t>2024/8/22</a:t>
             </a:fld>
             <a:endParaRPr lang="zh-CN" altLang="en-US"/>
           </a:p>
@@ -4908,7 +4995,7 @@
                 </a:solidFill>
               </a:rPr>
               <a:pPr/>
-              <a:t>2024/5/22</a:t>
+              <a:t>2024/8/22</a:t>
             </a:fld>
             <a:endParaRPr lang="zh-CN" altLang="en-US">
               <a:solidFill>
@@ -5138,7 +5225,7 @@
                 </a:solidFill>
               </a:rPr>
               <a:pPr/>
-              <a:t>2024/5/22</a:t>
+              <a:t>2024/8/22</a:t>
             </a:fld>
             <a:endParaRPr lang="zh-CN" altLang="en-US">
               <a:solidFill>
@@ -5387,7 +5474,7 @@
           <a:p>
             <a:fld id="{C18EDF5E-578C-4F7F-BA8F-EE7896D35C60}" type="datetimeFigureOut">
               <a:rPr lang="zh-CN" altLang="en-US" smtClean="0"/>
-              <a:t>2024/5/22</a:t>
+              <a:t>2024/8/22</a:t>
             </a:fld>
             <a:endParaRPr lang="zh-CN" altLang="en-US"/>
           </a:p>
@@ -5674,7 +5761,7 @@
           <a:p>
             <a:fld id="{C18EDF5E-578C-4F7F-BA8F-EE7896D35C60}" type="datetimeFigureOut">
               <a:rPr lang="zh-CN" altLang="en-US" smtClean="0"/>
-              <a:t>2024/5/22</a:t>
+              <a:t>2024/8/22</a:t>
             </a:fld>
             <a:endParaRPr lang="zh-CN" altLang="en-US"/>
           </a:p>
@@ -5951,7 +6038,7 @@
           <a:p>
             <a:fld id="{C18EDF5E-578C-4F7F-BA8F-EE7896D35C60}" type="datetimeFigureOut">
               <a:rPr lang="zh-CN" altLang="en-US" smtClean="0"/>
-              <a:t>2024/5/22</a:t>
+              <a:t>2024/8/22</a:t>
             </a:fld>
             <a:endParaRPr lang="zh-CN" altLang="en-US"/>
           </a:p>
@@ -6375,7 +6462,7 @@
           <a:p>
             <a:fld id="{C18EDF5E-578C-4F7F-BA8F-EE7896D35C60}" type="datetimeFigureOut">
               <a:rPr lang="zh-CN" altLang="en-US" smtClean="0"/>
-              <a:t>2024/5/22</a:t>
+              <a:t>2024/8/22</a:t>
             </a:fld>
             <a:endParaRPr lang="zh-CN" altLang="en-US"/>
           </a:p>
@@ -6799,7 +6886,7 @@
           <a:p>
             <a:fld id="{C18EDF5E-578C-4F7F-BA8F-EE7896D35C60}" type="datetimeFigureOut">
               <a:rPr lang="zh-CN" altLang="en-US" smtClean="0"/>
-              <a:t>2024/5/22</a:t>
+              <a:t>2024/8/22</a:t>
             </a:fld>
             <a:endParaRPr lang="zh-CN" altLang="en-US"/>
           </a:p>
@@ -7053,7 +7140,7 @@
           <a:p>
             <a:fld id="{C18EDF5E-578C-4F7F-BA8F-EE7896D35C60}" type="datetimeFigureOut">
               <a:rPr lang="zh-CN" altLang="en-US" smtClean="0"/>
-              <a:t>2024/5/22</a:t>
+              <a:t>2024/8/22</a:t>
             </a:fld>
             <a:endParaRPr lang="zh-CN" altLang="en-US"/>
           </a:p>
@@ -7178,7 +7265,7 @@
           <a:p>
             <a:fld id="{C18EDF5E-578C-4F7F-BA8F-EE7896D35C60}" type="datetimeFigureOut">
               <a:rPr lang="zh-CN" altLang="en-US" smtClean="0"/>
-              <a:t>2024/5/22</a:t>
+              <a:t>2024/8/22</a:t>
             </a:fld>
             <a:endParaRPr lang="zh-CN" altLang="en-US"/>
           </a:p>
@@ -7501,7 +7588,7 @@
           <a:p>
             <a:fld id="{C18EDF5E-578C-4F7F-BA8F-EE7896D35C60}" type="datetimeFigureOut">
               <a:rPr lang="zh-CN" altLang="en-US" smtClean="0"/>
-              <a:t>2024/5/22</a:t>
+              <a:t>2024/8/22</a:t>
             </a:fld>
             <a:endParaRPr lang="zh-CN" altLang="en-US"/>
           </a:p>
@@ -7763,7 +7850,7 @@
           <a:p>
             <a:fld id="{C18EDF5E-578C-4F7F-BA8F-EE7896D35C60}" type="datetimeFigureOut">
               <a:rPr lang="zh-CN" altLang="en-US" smtClean="0"/>
-              <a:t>2024/5/22</a:t>
+              <a:t>2024/8/22</a:t>
             </a:fld>
             <a:endParaRPr lang="zh-CN" altLang="en-US"/>
           </a:p>
@@ -27532,7 +27619,7 @@
                 <a:cs typeface="+mn-ea"/>
                 <a:sym typeface="+mn-lt"/>
               </a:rPr>
-              <a:t>课后作业</a:t>
+              <a:t>电控分流</a:t>
             </a:r>
             <a:endParaRPr lang="zh-CN" altLang="zh-CN" sz="5333" b="1" kern="100" dirty="0">
               <a:solidFill>
@@ -27660,6 +27747,1228 @@
     <p:extLst>
       <p:ext uri="{BB962C8B-B14F-4D97-AF65-F5344CB8AC3E}">
         <p14:creationId xmlns:p14="http://schemas.microsoft.com/office/powerpoint/2010/main" val="3480788593"/>
+      </p:ext>
+    </p:extLst>
+  </p:cSld>
+  <p:clrMapOvr>
+    <a:masterClrMapping/>
+  </p:clrMapOvr>
+  <mc:AlternateContent xmlns:mc="http://schemas.openxmlformats.org/markup-compatibility/2006" xmlns:p14="http://schemas.microsoft.com/office/powerpoint/2010/main">
+    <mc:Choice Requires="p14">
+      <p:transition spd="slow" p14:dur="1600" advTm="1481">
+        <p:blinds dir="vert"/>
+      </p:transition>
+    </mc:Choice>
+    <mc:Fallback xmlns="">
+      <p:transition spd="slow" advTm="1481">
+        <p:blinds dir="vert"/>
+      </p:transition>
+    </mc:Fallback>
+  </mc:AlternateContent>
+  <mc:AlternateContent xmlns:mc="http://schemas.openxmlformats.org/markup-compatibility/2006">
+    <mc:Choice xmlns:p14="http://schemas.microsoft.com/office/powerpoint/2010/main" Requires="p14">
+      <p:timing>
+        <p:tnLst>
+          <p:par>
+            <p:cTn id="1" dur="indefinite" restart="never" nodeType="tmRoot">
+              <p:childTnLst>
+                <p:seq concurrent="1" nextAc="seek">
+                  <p:cTn id="2" dur="indefinite" nodeType="mainSeq">
+                    <p:childTnLst>
+                      <p:par>
+                        <p:cTn id="3" fill="hold">
+                          <p:stCondLst>
+                            <p:cond delay="indefinite"/>
+                            <p:cond evt="onBegin" delay="0">
+                              <p:tn val="2"/>
+                            </p:cond>
+                          </p:stCondLst>
+                          <p:childTnLst>
+                            <p:par>
+                              <p:cTn id="4" fill="hold">
+                                <p:stCondLst>
+                                  <p:cond delay="0"/>
+                                </p:stCondLst>
+                                <p:childTnLst>
+                                  <p:par>
+                                    <p:cTn id="5" presetID="2" presetClass="entr" presetSubtype="12" fill="hold" grpId="0" nodeType="afterEffect" p14:presetBounceEnd="50000">
+                                      <p:stCondLst>
+                                        <p:cond delay="0"/>
+                                      </p:stCondLst>
+                                      <p:childTnLst>
+                                        <p:set>
+                                          <p:cBhvr>
+                                            <p:cTn id="6" dur="1" fill="hold">
+                                              <p:stCondLst>
+                                                <p:cond delay="0"/>
+                                              </p:stCondLst>
+                                            </p:cTn>
+                                            <p:tgtEl>
+                                              <p:spTgt spid="70"/>
+                                            </p:tgtEl>
+                                            <p:attrNameLst>
+                                              <p:attrName>style.visibility</p:attrName>
+                                            </p:attrNameLst>
+                                          </p:cBhvr>
+                                          <p:to>
+                                            <p:strVal val="visible"/>
+                                          </p:to>
+                                        </p:set>
+                                        <p:anim calcmode="lin" valueType="num" p14:bounceEnd="50000">
+                                          <p:cBhvr additive="base">
+                                            <p:cTn id="7" dur="1500" fill="hold"/>
+                                            <p:tgtEl>
+                                              <p:spTgt spid="70"/>
+                                            </p:tgtEl>
+                                            <p:attrNameLst>
+                                              <p:attrName>ppt_x</p:attrName>
+                                            </p:attrNameLst>
+                                          </p:cBhvr>
+                                          <p:tavLst>
+                                            <p:tav tm="0">
+                                              <p:val>
+                                                <p:strVal val="0-#ppt_w/2"/>
+                                              </p:val>
+                                            </p:tav>
+                                            <p:tav tm="100000">
+                                              <p:val>
+                                                <p:strVal val="#ppt_x"/>
+                                              </p:val>
+                                            </p:tav>
+                                          </p:tavLst>
+                                        </p:anim>
+                                        <p:anim calcmode="lin" valueType="num" p14:bounceEnd="50000">
+                                          <p:cBhvr additive="base">
+                                            <p:cTn id="8" dur="1500" fill="hold"/>
+                                            <p:tgtEl>
+                                              <p:spTgt spid="70"/>
+                                            </p:tgtEl>
+                                            <p:attrNameLst>
+                                              <p:attrName>ppt_y</p:attrName>
+                                            </p:attrNameLst>
+                                          </p:cBhvr>
+                                          <p:tavLst>
+                                            <p:tav tm="0">
+                                              <p:val>
+                                                <p:strVal val="1+#ppt_h/2"/>
+                                              </p:val>
+                                            </p:tav>
+                                            <p:tav tm="100000">
+                                              <p:val>
+                                                <p:strVal val="#ppt_y"/>
+                                              </p:val>
+                                            </p:tav>
+                                          </p:tavLst>
+                                        </p:anim>
+                                      </p:childTnLst>
+                                    </p:cTn>
+                                  </p:par>
+                                </p:childTnLst>
+                              </p:cTn>
+                            </p:par>
+                            <p:par>
+                              <p:cTn id="9" fill="hold">
+                                <p:stCondLst>
+                                  <p:cond delay="1500"/>
+                                </p:stCondLst>
+                                <p:childTnLst>
+                                  <p:par>
+                                    <p:cTn id="10" presetID="12" presetClass="entr" presetSubtype="4" fill="hold" grpId="0" nodeType="afterEffect">
+                                      <p:stCondLst>
+                                        <p:cond delay="0"/>
+                                      </p:stCondLst>
+                                      <p:childTnLst>
+                                        <p:set>
+                                          <p:cBhvr>
+                                            <p:cTn id="11" dur="1" fill="hold">
+                                              <p:stCondLst>
+                                                <p:cond delay="0"/>
+                                              </p:stCondLst>
+                                            </p:cTn>
+                                            <p:tgtEl>
+                                              <p:spTgt spid="67"/>
+                                            </p:tgtEl>
+                                            <p:attrNameLst>
+                                              <p:attrName>style.visibility</p:attrName>
+                                            </p:attrNameLst>
+                                          </p:cBhvr>
+                                          <p:to>
+                                            <p:strVal val="visible"/>
+                                          </p:to>
+                                        </p:set>
+                                        <p:anim calcmode="lin" valueType="num">
+                                          <p:cBhvr>
+                                            <p:cTn id="12" dur="500"/>
+                                            <p:tgtEl>
+                                              <p:spTgt spid="67"/>
+                                            </p:tgtEl>
+                                            <p:attrNameLst>
+                                              <p:attrName>ppt_y</p:attrName>
+                                            </p:attrNameLst>
+                                          </p:cBhvr>
+                                          <p:tavLst>
+                                            <p:tav tm="0">
+                                              <p:val>
+                                                <p:strVal val="#ppt_y+#ppt_h*1.125000"/>
+                                              </p:val>
+                                            </p:tav>
+                                            <p:tav tm="100000">
+                                              <p:val>
+                                                <p:strVal val="#ppt_y"/>
+                                              </p:val>
+                                            </p:tav>
+                                          </p:tavLst>
+                                        </p:anim>
+                                        <p:animEffect>
+                                          <p:cBhvr>
+                                            <p:cTn id="13" dur="500"/>
+                                            <p:tgtEl>
+                                              <p:spTgt spid="67"/>
+                                            </p:tgtEl>
+                                          </p:cBhvr>
+                                        </p:animEffect>
+                                      </p:childTnLst>
+                                    </p:cTn>
+                                  </p:par>
+                                </p:childTnLst>
+                              </p:cTn>
+                            </p:par>
+                          </p:childTnLst>
+                        </p:cTn>
+                      </p:par>
+                    </p:childTnLst>
+                  </p:cTn>
+                  <p:prevCondLst>
+                    <p:cond evt="onPrev" delay="0">
+                      <p:tgtEl>
+                        <p:sldTgt/>
+                      </p:tgtEl>
+                    </p:cond>
+                  </p:prevCondLst>
+                  <p:nextCondLst>
+                    <p:cond evt="onNext" delay="0">
+                      <p:tgtEl>
+                        <p:sldTgt/>
+                      </p:tgtEl>
+                    </p:cond>
+                  </p:nextCondLst>
+                </p:seq>
+              </p:childTnLst>
+            </p:cTn>
+          </p:par>
+        </p:tnLst>
+        <p:bldLst>
+          <p:bldP spid="70" grpId="0" animBg="1"/>
+          <p:bldP spid="67" grpId="0" bldLvl="0" autoUpdateAnimBg="0"/>
+        </p:bldLst>
+      </p:timing>
+    </mc:Choice>
+    <mc:Fallback>
+      <p:timing>
+        <p:tnLst>
+          <p:par>
+            <p:cTn id="1" dur="indefinite" restart="never" nodeType="tmRoot">
+              <p:childTnLst>
+                <p:seq concurrent="1" nextAc="seek">
+                  <p:cTn id="2" dur="indefinite" nodeType="mainSeq">
+                    <p:childTnLst>
+                      <p:par>
+                        <p:cTn id="3" fill="hold">
+                          <p:stCondLst>
+                            <p:cond delay="indefinite"/>
+                            <p:cond evt="onBegin" delay="0">
+                              <p:tn val="2"/>
+                            </p:cond>
+                          </p:stCondLst>
+                          <p:childTnLst>
+                            <p:par>
+                              <p:cTn id="4" fill="hold">
+                                <p:stCondLst>
+                                  <p:cond delay="0"/>
+                                </p:stCondLst>
+                                <p:childTnLst>
+                                  <p:par>
+                                    <p:cTn id="5" presetID="2" presetClass="entr" presetSubtype="12" fill="hold" grpId="0" nodeType="afterEffect">
+                                      <p:stCondLst>
+                                        <p:cond delay="0"/>
+                                      </p:stCondLst>
+                                      <p:childTnLst>
+                                        <p:set>
+                                          <p:cBhvr>
+                                            <p:cTn id="6" dur="1" fill="hold">
+                                              <p:stCondLst>
+                                                <p:cond delay="0"/>
+                                              </p:stCondLst>
+                                            </p:cTn>
+                                            <p:tgtEl>
+                                              <p:spTgt spid="70"/>
+                                            </p:tgtEl>
+                                            <p:attrNameLst>
+                                              <p:attrName>style.visibility</p:attrName>
+                                            </p:attrNameLst>
+                                          </p:cBhvr>
+                                          <p:to>
+                                            <p:strVal val="visible"/>
+                                          </p:to>
+                                        </p:set>
+                                        <p:anim calcmode="lin" valueType="num">
+                                          <p:cBhvr additive="base">
+                                            <p:cTn id="7" dur="1500" fill="hold"/>
+                                            <p:tgtEl>
+                                              <p:spTgt spid="70"/>
+                                            </p:tgtEl>
+                                            <p:attrNameLst>
+                                              <p:attrName>ppt_x</p:attrName>
+                                            </p:attrNameLst>
+                                          </p:cBhvr>
+                                          <p:tavLst>
+                                            <p:tav tm="0">
+                                              <p:val>
+                                                <p:strVal val="0-#ppt_w/2"/>
+                                              </p:val>
+                                            </p:tav>
+                                            <p:tav tm="100000">
+                                              <p:val>
+                                                <p:strVal val="#ppt_x"/>
+                                              </p:val>
+                                            </p:tav>
+                                          </p:tavLst>
+                                        </p:anim>
+                                        <p:anim calcmode="lin" valueType="num">
+                                          <p:cBhvr additive="base">
+                                            <p:cTn id="8" dur="1500" fill="hold"/>
+                                            <p:tgtEl>
+                                              <p:spTgt spid="70"/>
+                                            </p:tgtEl>
+                                            <p:attrNameLst>
+                                              <p:attrName>ppt_y</p:attrName>
+                                            </p:attrNameLst>
+                                          </p:cBhvr>
+                                          <p:tavLst>
+                                            <p:tav tm="0">
+                                              <p:val>
+                                                <p:strVal val="1+#ppt_h/2"/>
+                                              </p:val>
+                                            </p:tav>
+                                            <p:tav tm="100000">
+                                              <p:val>
+                                                <p:strVal val="#ppt_y"/>
+                                              </p:val>
+                                            </p:tav>
+                                          </p:tavLst>
+                                        </p:anim>
+                                      </p:childTnLst>
+                                    </p:cTn>
+                                  </p:par>
+                                </p:childTnLst>
+                              </p:cTn>
+                            </p:par>
+                            <p:par>
+                              <p:cTn id="9" fill="hold">
+                                <p:stCondLst>
+                                  <p:cond delay="1500"/>
+                                </p:stCondLst>
+                                <p:childTnLst>
+                                  <p:par>
+                                    <p:cTn id="10" presetID="12" presetClass="entr" presetSubtype="4" fill="hold" grpId="0" nodeType="afterEffect">
+                                      <p:stCondLst>
+                                        <p:cond delay="0"/>
+                                      </p:stCondLst>
+                                      <p:childTnLst>
+                                        <p:set>
+                                          <p:cBhvr>
+                                            <p:cTn id="11" dur="1" fill="hold">
+                                              <p:stCondLst>
+                                                <p:cond delay="0"/>
+                                              </p:stCondLst>
+                                            </p:cTn>
+                                            <p:tgtEl>
+                                              <p:spTgt spid="67"/>
+                                            </p:tgtEl>
+                                            <p:attrNameLst>
+                                              <p:attrName>style.visibility</p:attrName>
+                                            </p:attrNameLst>
+                                          </p:cBhvr>
+                                          <p:to>
+                                            <p:strVal val="visible"/>
+                                          </p:to>
+                                        </p:set>
+                                        <p:anim calcmode="lin" valueType="num">
+                                          <p:cBhvr>
+                                            <p:cTn id="12" dur="500"/>
+                                            <p:tgtEl>
+                                              <p:spTgt spid="67"/>
+                                            </p:tgtEl>
+                                            <p:attrNameLst>
+                                              <p:attrName>ppt_y</p:attrName>
+                                            </p:attrNameLst>
+                                          </p:cBhvr>
+                                          <p:tavLst>
+                                            <p:tav tm="0">
+                                              <p:val>
+                                                <p:strVal val="#ppt_y+#ppt_h*1.125000"/>
+                                              </p:val>
+                                            </p:tav>
+                                            <p:tav tm="100000">
+                                              <p:val>
+                                                <p:strVal val="#ppt_y"/>
+                                              </p:val>
+                                            </p:tav>
+                                          </p:tavLst>
+                                        </p:anim>
+                                        <p:animEffect>
+                                          <p:cBhvr>
+                                            <p:cTn id="13" dur="500"/>
+                                            <p:tgtEl>
+                                              <p:spTgt spid="67"/>
+                                            </p:tgtEl>
+                                          </p:cBhvr>
+                                        </p:animEffect>
+                                      </p:childTnLst>
+                                    </p:cTn>
+                                  </p:par>
+                                </p:childTnLst>
+                              </p:cTn>
+                            </p:par>
+                          </p:childTnLst>
+                        </p:cTn>
+                      </p:par>
+                    </p:childTnLst>
+                  </p:cTn>
+                  <p:prevCondLst>
+                    <p:cond evt="onPrev" delay="0">
+                      <p:tgtEl>
+                        <p:sldTgt/>
+                      </p:tgtEl>
+                    </p:cond>
+                  </p:prevCondLst>
+                  <p:nextCondLst>
+                    <p:cond evt="onNext" delay="0">
+                      <p:tgtEl>
+                        <p:sldTgt/>
+                      </p:tgtEl>
+                    </p:cond>
+                  </p:nextCondLst>
+                </p:seq>
+              </p:childTnLst>
+            </p:cTn>
+          </p:par>
+        </p:tnLst>
+        <p:bldLst>
+          <p:bldP spid="70" grpId="0" animBg="1"/>
+          <p:bldP spid="67" grpId="0" bldLvl="0" autoUpdateAnimBg="0"/>
+        </p:bldLst>
+      </p:timing>
+    </mc:Fallback>
+  </mc:AlternateContent>
+</p:sld>
+</file>
+
+<file path=ppt/slides/slide31.xml><?xml version="1.0" encoding="utf-8"?>
+<p:sld xmlns:a="http://schemas.openxmlformats.org/drawingml/2006/main" xmlns:r="http://schemas.openxmlformats.org/officeDocument/2006/relationships" xmlns:p="http://schemas.openxmlformats.org/presentationml/2006/main">
+  <p:cSld>
+    <p:spTree>
+      <p:nvGrpSpPr>
+        <p:cNvPr id="1" name=""/>
+        <p:cNvGrpSpPr/>
+        <p:nvPr/>
+      </p:nvGrpSpPr>
+      <p:grpSpPr>
+        <a:xfrm>
+          <a:off x="0" y="0"/>
+          <a:ext cx="0" cy="0"/>
+          <a:chOff x="0" y="0"/>
+          <a:chExt cx="0" cy="0"/>
+        </a:xfrm>
+      </p:grpSpPr>
+      <p:sp>
+        <p:nvSpPr>
+          <p:cNvPr id="2" name="文本框 1">
+            <a:extLst>
+              <a:ext uri="{FF2B5EF4-FFF2-40B4-BE49-F238E27FC236}">
+                <a16:creationId xmlns:a16="http://schemas.microsoft.com/office/drawing/2014/main" id="{A144EA9B-94A6-7024-8B93-CEE8C30E5A7C}"/>
+              </a:ext>
+            </a:extLst>
+          </p:cNvPr>
+          <p:cNvSpPr txBox="1"/>
+          <p:nvPr/>
+        </p:nvSpPr>
+        <p:spPr>
+          <a:xfrm>
+            <a:off x="1312986" y="1178168"/>
+            <a:ext cx="8833337" cy="3139321"/>
+          </a:xfrm>
+          <a:prstGeom prst="rect">
+            <a:avLst/>
+          </a:prstGeom>
+          <a:noFill/>
+        </p:spPr>
+        <p:txBody>
+          <a:bodyPr wrap="square" rtlCol="0">
+            <a:spAutoFit/>
+          </a:bodyPr>
+          <a:lstStyle/>
+          <a:p>
+            <a:r>
+              <a:rPr lang="en-US" altLang="zh-CN" dirty="0"/>
+              <a:t>2017-2023 </a:t>
+            </a:r>
+            <a:r>
+              <a:rPr lang="zh-CN" altLang="en-US" dirty="0"/>
+              <a:t>刘子恺学长  </a:t>
+            </a:r>
+            <a:r>
+              <a:rPr lang="en-US" altLang="zh-CN" dirty="0"/>
+              <a:t>STM32 + </a:t>
+            </a:r>
+            <a:r>
+              <a:rPr lang="en-US" altLang="zh-CN" dirty="0" err="1"/>
+              <a:t>ChibiOS</a:t>
+            </a:r>
+            <a:r>
+              <a:rPr lang="en-US" altLang="zh-CN" dirty="0"/>
+              <a:t> </a:t>
+            </a:r>
+            <a:r>
+              <a:rPr lang="zh-CN" altLang="en-US" dirty="0"/>
+              <a:t>实时操作系统开发</a:t>
+            </a:r>
+            <a:endParaRPr lang="en-US" altLang="zh-CN" dirty="0"/>
+          </a:p>
+          <a:p>
+            <a:r>
+              <a:rPr lang="en-US" altLang="zh-CN" dirty="0"/>
+              <a:t>2023-2024 </a:t>
+            </a:r>
+            <a:r>
+              <a:rPr lang="zh-CN" altLang="en-US" dirty="0"/>
+              <a:t>纪耀方（前往本部学习之后） </a:t>
+            </a:r>
+            <a:r>
+              <a:rPr lang="en-US" altLang="zh-CN" dirty="0"/>
+              <a:t>STM32 + </a:t>
+            </a:r>
+            <a:r>
+              <a:rPr lang="en-US" altLang="zh-CN" dirty="0" err="1"/>
+              <a:t>CubeMX</a:t>
+            </a:r>
+            <a:r>
+              <a:rPr lang="en-US" altLang="zh-CN" dirty="0"/>
+              <a:t> + </a:t>
+            </a:r>
+            <a:r>
+              <a:rPr lang="zh-CN" altLang="en-US" dirty="0"/>
+              <a:t>裸机开发</a:t>
+            </a:r>
+            <a:endParaRPr lang="en-US" altLang="zh-CN" dirty="0"/>
+          </a:p>
+          <a:p>
+            <a:r>
+              <a:rPr lang="en-US" altLang="zh-CN" dirty="0"/>
+              <a:t>2023-2024 </a:t>
+            </a:r>
+            <a:r>
+              <a:rPr lang="zh-CN" altLang="en-US" dirty="0"/>
+              <a:t>姚昕辰 </a:t>
+            </a:r>
+            <a:r>
+              <a:rPr lang="en-US" altLang="zh-CN" dirty="0"/>
+              <a:t>Linux</a:t>
+            </a:r>
+            <a:r>
+              <a:rPr lang="zh-CN" altLang="en-US" dirty="0"/>
+              <a:t>操作系统</a:t>
+            </a:r>
+            <a:r>
+              <a:rPr lang="en-US" altLang="zh-CN" dirty="0"/>
+              <a:t>+ROS2</a:t>
+            </a:r>
+          </a:p>
+          <a:p>
+            <a:endParaRPr lang="en-US" altLang="zh-CN" dirty="0"/>
+          </a:p>
+          <a:p>
+            <a:endParaRPr lang="en-US" altLang="zh-CN" dirty="0"/>
+          </a:p>
+          <a:p>
+            <a:r>
+              <a:rPr lang="zh-CN" altLang="en-US" dirty="0"/>
+              <a:t>战队电控和视觉全部合并，已经全面导向</a:t>
+            </a:r>
+            <a:r>
+              <a:rPr lang="en-US" altLang="zh-CN" dirty="0"/>
+              <a:t>ROS2</a:t>
+            </a:r>
+            <a:r>
+              <a:rPr lang="zh-CN" altLang="en-US" dirty="0"/>
+              <a:t>开发。</a:t>
+            </a:r>
+            <a:endParaRPr lang="en-US" altLang="zh-CN" dirty="0"/>
+          </a:p>
+          <a:p>
+            <a:endParaRPr lang="en-US" altLang="zh-CN" dirty="0"/>
+          </a:p>
+          <a:p>
+            <a:r>
+              <a:rPr lang="zh-CN" altLang="en-US" dirty="0"/>
+              <a:t>接下来大家需要选择合适的技术路线：</a:t>
+            </a:r>
+            <a:endParaRPr lang="en-US" altLang="zh-CN" dirty="0"/>
+          </a:p>
+          <a:p>
+            <a:r>
+              <a:rPr lang="zh-CN" altLang="en-US" dirty="0"/>
+              <a:t>技术路线一：开始学习纪耀方留下的电控教程（推荐）</a:t>
+            </a:r>
+            <a:endParaRPr lang="en-US" altLang="zh-CN" dirty="0"/>
+          </a:p>
+          <a:p>
+            <a:r>
+              <a:rPr lang="zh-CN" altLang="en-US" dirty="0"/>
+              <a:t>技术路线二：</a:t>
+            </a:r>
+            <a:r>
+              <a:rPr lang="en-US" altLang="zh-CN" dirty="0"/>
+              <a:t>ROS2</a:t>
+            </a:r>
+            <a:r>
+              <a:rPr lang="zh-CN" altLang="en-US" dirty="0"/>
+              <a:t> </a:t>
+            </a:r>
+            <a:r>
+              <a:rPr lang="en-US" altLang="zh-CN" dirty="0"/>
+              <a:t>+ ROS2 Control </a:t>
+            </a:r>
+            <a:r>
+              <a:rPr lang="zh-CN" altLang="en-US" dirty="0"/>
+              <a:t>（适合对</a:t>
+            </a:r>
+            <a:r>
+              <a:rPr lang="en-US" altLang="zh-CN" dirty="0"/>
+              <a:t>Linux</a:t>
+            </a:r>
+            <a:r>
+              <a:rPr lang="zh-CN" altLang="en-US" dirty="0"/>
+              <a:t>和</a:t>
+            </a:r>
+            <a:r>
+              <a:rPr lang="en-US" altLang="zh-CN" dirty="0"/>
+              <a:t>C++</a:t>
+            </a:r>
+            <a:r>
+              <a:rPr lang="zh-CN" altLang="en-US" dirty="0"/>
+              <a:t>有较深基础）</a:t>
+            </a:r>
+            <a:endParaRPr lang="en-US" altLang="zh-CN" dirty="0"/>
+          </a:p>
+          <a:p>
+            <a:r>
+              <a:rPr lang="zh-CN" altLang="en-US" dirty="0"/>
+              <a:t>技术路线三：维护刘子恺学长留下的代码（我懂的稍微多一些）</a:t>
+            </a:r>
+            <a:endParaRPr lang="en-US" altLang="zh-CN" dirty="0"/>
+          </a:p>
+        </p:txBody>
+      </p:sp>
+      <p:sp>
+        <p:nvSpPr>
+          <p:cNvPr id="3" name="文本框 8">
+            <a:extLst>
+              <a:ext uri="{FF2B5EF4-FFF2-40B4-BE49-F238E27FC236}">
+                <a16:creationId xmlns:a16="http://schemas.microsoft.com/office/drawing/2014/main" id="{5F319695-97FC-6191-E30D-34702E17EBDE}"/>
+              </a:ext>
+            </a:extLst>
+          </p:cNvPr>
+          <p:cNvSpPr txBox="1"/>
+          <p:nvPr/>
+        </p:nvSpPr>
+        <p:spPr>
+          <a:xfrm>
+            <a:off x="986256" y="442342"/>
+            <a:ext cx="7865644" cy="461665"/>
+          </a:xfrm>
+          <a:prstGeom prst="rect">
+            <a:avLst/>
+          </a:prstGeom>
+          <a:noFill/>
+        </p:spPr>
+        <p:txBody>
+          <a:bodyPr wrap="square" lIns="91440" tIns="45720" rIns="91440" bIns="45720" rtlCol="0">
+            <a:spAutoFit/>
+          </a:bodyPr>
+          <a:lstStyle>
+            <a:defPPr>
+              <a:defRPr lang="zh-CN"/>
+            </a:defPPr>
+            <a:lvl1pPr marL="0" algn="l" defTabSz="914400" rtl="0" eaLnBrk="1" latinLnBrk="0" hangingPunct="1">
+              <a:defRPr sz="1800" kern="1200">
+                <a:solidFill>
+                  <a:schemeClr val="tx1"/>
+                </a:solidFill>
+                <a:latin typeface="+mn-lt"/>
+                <a:ea typeface="+mn-ea"/>
+                <a:cs typeface="+mn-cs"/>
+              </a:defRPr>
+            </a:lvl1pPr>
+            <a:lvl2pPr marL="457200" algn="l" defTabSz="914400" rtl="0" eaLnBrk="1" latinLnBrk="0" hangingPunct="1">
+              <a:defRPr sz="1800" kern="1200">
+                <a:solidFill>
+                  <a:schemeClr val="tx1"/>
+                </a:solidFill>
+                <a:latin typeface="+mn-lt"/>
+                <a:ea typeface="+mn-ea"/>
+                <a:cs typeface="+mn-cs"/>
+              </a:defRPr>
+            </a:lvl2pPr>
+            <a:lvl3pPr marL="914400" algn="l" defTabSz="914400" rtl="0" eaLnBrk="1" latinLnBrk="0" hangingPunct="1">
+              <a:defRPr sz="1800" kern="1200">
+                <a:solidFill>
+                  <a:schemeClr val="tx1"/>
+                </a:solidFill>
+                <a:latin typeface="+mn-lt"/>
+                <a:ea typeface="+mn-ea"/>
+                <a:cs typeface="+mn-cs"/>
+              </a:defRPr>
+            </a:lvl3pPr>
+            <a:lvl4pPr marL="1371600" algn="l" defTabSz="914400" rtl="0" eaLnBrk="1" latinLnBrk="0" hangingPunct="1">
+              <a:defRPr sz="1800" kern="1200">
+                <a:solidFill>
+                  <a:schemeClr val="tx1"/>
+                </a:solidFill>
+                <a:latin typeface="+mn-lt"/>
+                <a:ea typeface="+mn-ea"/>
+                <a:cs typeface="+mn-cs"/>
+              </a:defRPr>
+            </a:lvl4pPr>
+            <a:lvl5pPr marL="1828800" algn="l" defTabSz="914400" rtl="0" eaLnBrk="1" latinLnBrk="0" hangingPunct="1">
+              <a:defRPr sz="1800" kern="1200">
+                <a:solidFill>
+                  <a:schemeClr val="tx1"/>
+                </a:solidFill>
+                <a:latin typeface="+mn-lt"/>
+                <a:ea typeface="+mn-ea"/>
+                <a:cs typeface="+mn-cs"/>
+              </a:defRPr>
+            </a:lvl5pPr>
+            <a:lvl6pPr marL="2286000" algn="l" defTabSz="914400" rtl="0" eaLnBrk="1" latinLnBrk="0" hangingPunct="1">
+              <a:defRPr sz="1800" kern="1200">
+                <a:solidFill>
+                  <a:schemeClr val="tx1"/>
+                </a:solidFill>
+                <a:latin typeface="+mn-lt"/>
+                <a:ea typeface="+mn-ea"/>
+                <a:cs typeface="+mn-cs"/>
+              </a:defRPr>
+            </a:lvl6pPr>
+            <a:lvl7pPr marL="2743200" algn="l" defTabSz="914400" rtl="0" eaLnBrk="1" latinLnBrk="0" hangingPunct="1">
+              <a:defRPr sz="1800" kern="1200">
+                <a:solidFill>
+                  <a:schemeClr val="tx1"/>
+                </a:solidFill>
+                <a:latin typeface="+mn-lt"/>
+                <a:ea typeface="+mn-ea"/>
+                <a:cs typeface="+mn-cs"/>
+              </a:defRPr>
+            </a:lvl7pPr>
+            <a:lvl8pPr marL="3200400" algn="l" defTabSz="914400" rtl="0" eaLnBrk="1" latinLnBrk="0" hangingPunct="1">
+              <a:defRPr sz="1800" kern="1200">
+                <a:solidFill>
+                  <a:schemeClr val="tx1"/>
+                </a:solidFill>
+                <a:latin typeface="+mn-lt"/>
+                <a:ea typeface="+mn-ea"/>
+                <a:cs typeface="+mn-cs"/>
+              </a:defRPr>
+            </a:lvl8pPr>
+            <a:lvl9pPr marL="3657600" algn="l" defTabSz="914400" rtl="0" eaLnBrk="1" latinLnBrk="0" hangingPunct="1">
+              <a:defRPr sz="1800" kern="1200">
+                <a:solidFill>
+                  <a:schemeClr val="tx1"/>
+                </a:solidFill>
+                <a:latin typeface="+mn-lt"/>
+                <a:ea typeface="+mn-ea"/>
+                <a:cs typeface="+mn-cs"/>
+              </a:defRPr>
+            </a:lvl9pPr>
+          </a:lstStyle>
+          <a:p>
+            <a:r>
+              <a:rPr lang="zh-CN" altLang="en-US" sz="2400" dirty="0">
+                <a:solidFill>
+                  <a:srgbClr val="2B3E54"/>
+                </a:solidFill>
+                <a:cs typeface="+mn-ea"/>
+                <a:sym typeface="+mn-lt"/>
+              </a:rPr>
+              <a:t>战队采取的技术路线总览</a:t>
+            </a:r>
+            <a:endParaRPr lang="en-US" altLang="zh-CN" sz="2400" dirty="0">
+              <a:solidFill>
+                <a:srgbClr val="2B3E54"/>
+              </a:solidFill>
+              <a:cs typeface="+mn-ea"/>
+              <a:sym typeface="+mn-lt"/>
+            </a:endParaRPr>
+          </a:p>
+        </p:txBody>
+      </p:sp>
+    </p:spTree>
+    <p:extLst>
+      <p:ext uri="{BB962C8B-B14F-4D97-AF65-F5344CB8AC3E}">
+        <p14:creationId xmlns:p14="http://schemas.microsoft.com/office/powerpoint/2010/main" val="1191084472"/>
+      </p:ext>
+    </p:extLst>
+  </p:cSld>
+  <p:clrMapOvr>
+    <a:masterClrMapping/>
+  </p:clrMapOvr>
+  <mc:AlternateContent xmlns:mc="http://schemas.openxmlformats.org/markup-compatibility/2006" xmlns:p14="http://schemas.microsoft.com/office/powerpoint/2010/main">
+    <mc:Choice Requires="p14">
+      <p:transition spd="med" p14:dur="700" advTm="5000">
+        <p:fade/>
+      </p:transition>
+    </mc:Choice>
+    <mc:Fallback xmlns="">
+      <p:transition spd="med" advTm="5000">
+        <p:fade/>
+      </p:transition>
+    </mc:Fallback>
+  </mc:AlternateContent>
+  <p:timing>
+    <p:tnLst>
+      <p:par>
+        <p:cTn id="1" dur="indefinite" restart="never" nodeType="tmRoot">
+          <p:childTnLst>
+            <p:seq concurrent="1" nextAc="seek">
+              <p:cTn id="2" dur="indefinite" nodeType="mainSeq">
+                <p:childTnLst>
+                  <p:par>
+                    <p:cTn id="3" fill="hold">
+                      <p:stCondLst>
+                        <p:cond delay="indefinite"/>
+                        <p:cond evt="onBegin" delay="0">
+                          <p:tn val="2"/>
+                        </p:cond>
+                      </p:stCondLst>
+                      <p:childTnLst>
+                        <p:par>
+                          <p:cTn id="4" fill="hold">
+                            <p:stCondLst>
+                              <p:cond delay="0"/>
+                            </p:stCondLst>
+                            <p:childTnLst>
+                              <p:par>
+                                <p:cTn id="5" presetID="15" presetClass="entr" presetSubtype="0" fill="hold" grpId="0" nodeType="afterEffect">
+                                  <p:stCondLst>
+                                    <p:cond delay="0"/>
+                                  </p:stCondLst>
+                                  <p:childTnLst>
+                                    <p:set>
+                                      <p:cBhvr>
+                                        <p:cTn id="6" dur="1" fill="hold">
+                                          <p:stCondLst>
+                                            <p:cond delay="0"/>
+                                          </p:stCondLst>
+                                        </p:cTn>
+                                        <p:tgtEl>
+                                          <p:spTgt spid="3"/>
+                                        </p:tgtEl>
+                                        <p:attrNameLst>
+                                          <p:attrName>style.visibility</p:attrName>
+                                        </p:attrNameLst>
+                                      </p:cBhvr>
+                                      <p:to>
+                                        <p:strVal val="visible"/>
+                                      </p:to>
+                                    </p:set>
+                                    <p:anim calcmode="lin" valueType="num">
+                                      <p:cBhvr>
+                                        <p:cTn id="7" dur="1000" fill="hold"/>
+                                        <p:tgtEl>
+                                          <p:spTgt spid="3"/>
+                                        </p:tgtEl>
+                                        <p:attrNameLst>
+                                          <p:attrName>ppt_w</p:attrName>
+                                        </p:attrNameLst>
+                                      </p:cBhvr>
+                                      <p:tavLst>
+                                        <p:tav tm="0">
+                                          <p:val>
+                                            <p:fltVal val="0"/>
+                                          </p:val>
+                                        </p:tav>
+                                        <p:tav tm="100000">
+                                          <p:val>
+                                            <p:strVal val="#ppt_w"/>
+                                          </p:val>
+                                        </p:tav>
+                                      </p:tavLst>
+                                    </p:anim>
+                                    <p:anim calcmode="lin" valueType="num">
+                                      <p:cBhvr>
+                                        <p:cTn id="8" dur="1000" fill="hold"/>
+                                        <p:tgtEl>
+                                          <p:spTgt spid="3"/>
+                                        </p:tgtEl>
+                                        <p:attrNameLst>
+                                          <p:attrName>ppt_h</p:attrName>
+                                        </p:attrNameLst>
+                                      </p:cBhvr>
+                                      <p:tavLst>
+                                        <p:tav tm="0">
+                                          <p:val>
+                                            <p:fltVal val="0"/>
+                                          </p:val>
+                                        </p:tav>
+                                        <p:tav tm="100000">
+                                          <p:val>
+                                            <p:strVal val="#ppt_h"/>
+                                          </p:val>
+                                        </p:tav>
+                                      </p:tavLst>
+                                    </p:anim>
+                                    <p:anim calcmode="lin" valueType="num">
+                                      <p:cBhvr>
+                                        <p:cTn id="9" dur="1000" fill="hold"/>
+                                        <p:tgtEl>
+                                          <p:spTgt spid="3"/>
+                                        </p:tgtEl>
+                                        <p:attrNameLst>
+                                          <p:attrName>ppt_x</p:attrName>
+                                        </p:attrNameLst>
+                                      </p:cBhvr>
+                                      <p:tavLst>
+                                        <p:tav tm="0" fmla="#ppt_x+(cos(-2*pi*(1-$))*-#ppt_x-sin(-2*pi*(1-$))*(1-#ppt_y))*(1-$)">
+                                          <p:val>
+                                            <p:fltVal val="0"/>
+                                          </p:val>
+                                        </p:tav>
+                                        <p:tav tm="100000">
+                                          <p:val>
+                                            <p:fltVal val="1"/>
+                                          </p:val>
+                                        </p:tav>
+                                      </p:tavLst>
+                                    </p:anim>
+                                    <p:anim calcmode="lin" valueType="num">
+                                      <p:cBhvr>
+                                        <p:cTn id="10" dur="1000" fill="hold"/>
+                                        <p:tgtEl>
+                                          <p:spTgt spid="3"/>
+                                        </p:tgtEl>
+                                        <p:attrNameLst>
+                                          <p:attrName>ppt_y</p:attrName>
+                                        </p:attrNameLst>
+                                      </p:cBhvr>
+                                      <p:tavLst>
+                                        <p:tav tm="0" fmla="#ppt_y+(sin(-2*pi*(1-$))*-#ppt_x+cos(-2*pi*(1-$))*(1-#ppt_y))*(1-$)">
+                                          <p:val>
+                                            <p:fltVal val="0"/>
+                                          </p:val>
+                                        </p:tav>
+                                        <p:tav tm="100000">
+                                          <p:val>
+                                            <p:fltVal val="1"/>
+                                          </p:val>
+                                        </p:tav>
+                                      </p:tavLst>
+                                    </p:anim>
+                                  </p:childTnLst>
+                                </p:cTn>
+                              </p:par>
+                            </p:childTnLst>
+                          </p:cTn>
+                        </p:par>
+                      </p:childTnLst>
+                    </p:cTn>
+                  </p:par>
+                </p:childTnLst>
+              </p:cTn>
+              <p:prevCondLst>
+                <p:cond evt="onPrev" delay="0">
+                  <p:tgtEl>
+                    <p:sldTgt/>
+                  </p:tgtEl>
+                </p:cond>
+              </p:prevCondLst>
+              <p:nextCondLst>
+                <p:cond evt="onNext" delay="0">
+                  <p:tgtEl>
+                    <p:sldTgt/>
+                  </p:tgtEl>
+                </p:cond>
+              </p:nextCondLst>
+            </p:seq>
+          </p:childTnLst>
+        </p:cTn>
+      </p:par>
+    </p:tnLst>
+    <p:bldLst>
+      <p:bldP spid="3" grpId="0"/>
+    </p:bldLst>
+  </p:timing>
+</p:sld>
+</file>
+
+<file path=ppt/slides/slide32.xml><?xml version="1.0" encoding="utf-8"?>
+<p:sld xmlns:a="http://schemas.openxmlformats.org/drawingml/2006/main" xmlns:r="http://schemas.openxmlformats.org/officeDocument/2006/relationships" xmlns:p="http://schemas.openxmlformats.org/presentationml/2006/main">
+  <p:cSld>
+    <p:spTree>
+      <p:nvGrpSpPr>
+        <p:cNvPr id="1" name=""/>
+        <p:cNvGrpSpPr/>
+        <p:nvPr/>
+      </p:nvGrpSpPr>
+      <p:grpSpPr>
+        <a:xfrm>
+          <a:off x="0" y="0"/>
+          <a:ext cx="0" cy="0"/>
+          <a:chOff x="0" y="0"/>
+          <a:chExt cx="0" cy="0"/>
+        </a:xfrm>
+      </p:grpSpPr>
+      <p:sp>
+        <p:nvSpPr>
+          <p:cNvPr id="70" name="矩形 10"/>
+          <p:cNvSpPr>
+            <a:spLocks noChangeAspect="1"/>
+          </p:cNvSpPr>
+          <p:nvPr/>
+        </p:nvSpPr>
+        <p:spPr>
+          <a:xfrm>
+            <a:off x="4751851" y="1604797"/>
+            <a:ext cx="2496277" cy="2185899"/>
+          </a:xfrm>
+          <a:prstGeom prst="hexagon">
+            <a:avLst/>
+          </a:prstGeom>
+          <a:solidFill>
+            <a:srgbClr val="2B3E54"/>
+          </a:solidFill>
+          <a:ln w="15875">
+            <a:noFill/>
+          </a:ln>
+          <a:effectLst/>
+        </p:spPr>
+        <p:style>
+          <a:lnRef idx="2">
+            <a:schemeClr val="accent1">
+              <a:shade val="50000"/>
+            </a:schemeClr>
+          </a:lnRef>
+          <a:fillRef idx="1">
+            <a:schemeClr val="accent1"/>
+          </a:fillRef>
+          <a:effectRef idx="0">
+            <a:schemeClr val="accent1"/>
+          </a:effectRef>
+          <a:fontRef idx="minor">
+            <a:schemeClr val="lt1"/>
+          </a:fontRef>
+        </p:style>
+        <p:txBody>
+          <a:bodyPr anchor="ctr"/>
+          <a:lstStyle/>
+          <a:p>
+            <a:pPr algn="ctr"/>
+            <a:endParaRPr lang="zh-CN" altLang="en-US" sz="2400" dirty="0">
+              <a:solidFill>
+                <a:prstClr val="white"/>
+              </a:solidFill>
+              <a:cs typeface="+mn-ea"/>
+              <a:sym typeface="+mn-lt"/>
+            </a:endParaRPr>
+          </a:p>
+        </p:txBody>
+      </p:sp>
+      <p:sp>
+        <p:nvSpPr>
+          <p:cNvPr id="67" name="文本框 8"/>
+          <p:cNvSpPr>
+            <a:spLocks noChangeArrowheads="1"/>
+          </p:cNvSpPr>
+          <p:nvPr/>
+        </p:nvSpPr>
+        <p:spPr bwMode="auto">
+          <a:xfrm>
+            <a:off x="3270374" y="4188701"/>
+            <a:ext cx="5651252" cy="912991"/>
+          </a:xfrm>
+          <a:prstGeom prst="rect">
+            <a:avLst/>
+          </a:prstGeom>
+          <a:noFill/>
+          <a:ln>
+            <a:noFill/>
+          </a:ln>
+          <a:effectLst/>
+          <a:extLst>
+            <a:ext uri="{909E8E84-426E-40DD-AFC4-6F175D3DCCD1}">
+              <a14:hiddenFill xmlns:a14="http://schemas.microsoft.com/office/drawing/2010/main">
+                <a:solidFill>
+                  <a:srgbClr val="FFFFFF"/>
+                </a:solidFill>
+              </a14:hiddenFill>
+            </a:ext>
+            <a:ext uri="{91240B29-F687-4F45-9708-019B960494DF}">
+              <a14:hiddenLine xmlns:a14="http://schemas.microsoft.com/office/drawing/2010/main" w="9525">
+                <a:solidFill>
+                  <a:srgbClr val="000000"/>
+                </a:solidFill>
+                <a:bevel/>
+                <a:headEnd/>
+                <a:tailEnd/>
+              </a14:hiddenLine>
+            </a:ext>
+          </a:extLst>
+        </p:spPr>
+        <p:txBody>
+          <a:bodyPr wrap="square" lIns="91421" tIns="45712" rIns="91421" bIns="45712">
+            <a:spAutoFit/>
+          </a:bodyPr>
+          <a:lstStyle/>
+          <a:p>
+            <a:pPr algn="ctr"/>
+            <a:r>
+              <a:rPr lang="zh-CN" altLang="en-US" sz="5333" b="1" kern="100" dirty="0">
+                <a:solidFill>
+                  <a:schemeClr val="tx1">
+                    <a:lumMod val="65000"/>
+                    <a:lumOff val="35000"/>
+                  </a:schemeClr>
+                </a:solidFill>
+                <a:cs typeface="+mn-ea"/>
+                <a:sym typeface="+mn-lt"/>
+              </a:rPr>
+              <a:t>课后作业</a:t>
+            </a:r>
+            <a:endParaRPr lang="zh-CN" altLang="zh-CN" sz="5333" b="1" kern="100" dirty="0">
+              <a:solidFill>
+                <a:schemeClr val="tx1">
+                  <a:lumMod val="65000"/>
+                  <a:lumOff val="35000"/>
+                </a:schemeClr>
+              </a:solidFill>
+              <a:cs typeface="+mn-ea"/>
+              <a:sym typeface="+mn-lt"/>
+            </a:endParaRPr>
+          </a:p>
+        </p:txBody>
+      </p:sp>
+      <p:sp>
+        <p:nvSpPr>
+          <p:cNvPr id="71" name="矩形 10"/>
+          <p:cNvSpPr>
+            <a:spLocks noChangeAspect="1"/>
+          </p:cNvSpPr>
+          <p:nvPr/>
+        </p:nvSpPr>
+        <p:spPr>
+          <a:xfrm>
+            <a:off x="6483819" y="3263650"/>
+            <a:ext cx="956331" cy="837424"/>
+          </a:xfrm>
+          <a:prstGeom prst="hexagon">
+            <a:avLst/>
+          </a:prstGeom>
+          <a:solidFill>
+            <a:srgbClr val="2B3E54"/>
+          </a:solidFill>
+          <a:ln w="15875">
+            <a:gradFill>
+              <a:gsLst>
+                <a:gs pos="100000">
+                  <a:schemeClr val="bg1">
+                    <a:lumMod val="85000"/>
+                  </a:schemeClr>
+                </a:gs>
+                <a:gs pos="0">
+                  <a:schemeClr val="bg1"/>
+                </a:gs>
+              </a:gsLst>
+              <a:lin ang="8100000" scaled="0"/>
+            </a:gradFill>
+          </a:ln>
+          <a:effectLst/>
+        </p:spPr>
+        <p:style>
+          <a:lnRef idx="2">
+            <a:schemeClr val="accent1">
+              <a:shade val="50000"/>
+            </a:schemeClr>
+          </a:lnRef>
+          <a:fillRef idx="1">
+            <a:schemeClr val="accent1"/>
+          </a:fillRef>
+          <a:effectRef idx="0">
+            <a:schemeClr val="accent1"/>
+          </a:effectRef>
+          <a:fontRef idx="minor">
+            <a:schemeClr val="lt1"/>
+          </a:fontRef>
+        </p:style>
+        <p:txBody>
+          <a:bodyPr anchor="ctr"/>
+          <a:lstStyle/>
+          <a:p>
+            <a:pPr algn="ctr"/>
+            <a:endParaRPr lang="zh-CN" altLang="en-US" sz="2400" dirty="0">
+              <a:solidFill>
+                <a:prstClr val="white"/>
+              </a:solidFill>
+              <a:cs typeface="+mn-ea"/>
+              <a:sym typeface="+mn-lt"/>
+            </a:endParaRPr>
+          </a:p>
+        </p:txBody>
+      </p:sp>
+      <p:sp>
+        <p:nvSpPr>
+          <p:cNvPr id="74" name="TextBox 73"/>
+          <p:cNvSpPr txBox="1"/>
+          <p:nvPr/>
+        </p:nvSpPr>
+        <p:spPr>
+          <a:xfrm>
+            <a:off x="6563862" y="3351277"/>
+            <a:ext cx="745717" cy="666786"/>
+          </a:xfrm>
+          <a:prstGeom prst="rect">
+            <a:avLst/>
+          </a:prstGeom>
+          <a:noFill/>
+        </p:spPr>
+        <p:txBody>
+          <a:bodyPr wrap="none" rtlCol="0">
+            <a:spAutoFit/>
+          </a:bodyPr>
+          <a:lstStyle/>
+          <a:p>
+            <a:r>
+              <a:rPr lang="en-US" altLang="zh-CN" sz="3733" dirty="0">
+                <a:solidFill>
+                  <a:schemeClr val="bg1"/>
+                </a:solidFill>
+                <a:cs typeface="+mn-ea"/>
+                <a:sym typeface="+mn-lt"/>
+              </a:rPr>
+              <a:t>06</a:t>
+            </a:r>
+            <a:endParaRPr lang="zh-CN" altLang="en-US" sz="3733" dirty="0">
+              <a:solidFill>
+                <a:schemeClr val="bg1"/>
+              </a:solidFill>
+              <a:cs typeface="+mn-ea"/>
+              <a:sym typeface="+mn-lt"/>
+            </a:endParaRPr>
+          </a:p>
+        </p:txBody>
+      </p:sp>
+    </p:spTree>
+    <p:extLst>
+      <p:ext uri="{BB962C8B-B14F-4D97-AF65-F5344CB8AC3E}">
+        <p14:creationId xmlns:p14="http://schemas.microsoft.com/office/powerpoint/2010/main" val="3668967229"/>
       </p:ext>
     </p:extLst>
   </p:cSld>
@@ -28077,7 +29386,99 @@
 </p:sld>
 </file>
 
-<file path=ppt/slides/slide31.xml><?xml version="1.0" encoding="utf-8"?>
+<file path=ppt/slides/slide33.xml><?xml version="1.0" encoding="utf-8"?>
+<p:sld xmlns:a="http://schemas.openxmlformats.org/drawingml/2006/main" xmlns:r="http://schemas.openxmlformats.org/officeDocument/2006/relationships" xmlns:p="http://schemas.openxmlformats.org/presentationml/2006/main">
+  <p:cSld>
+    <p:spTree>
+      <p:nvGrpSpPr>
+        <p:cNvPr id="1" name=""/>
+        <p:cNvGrpSpPr/>
+        <p:nvPr/>
+      </p:nvGrpSpPr>
+      <p:grpSpPr>
+        <a:xfrm>
+          <a:off x="0" y="0"/>
+          <a:ext cx="0" cy="0"/>
+          <a:chOff x="0" y="0"/>
+          <a:chExt cx="0" cy="0"/>
+        </a:xfrm>
+      </p:grpSpPr>
+      <p:sp>
+        <p:nvSpPr>
+          <p:cNvPr id="2" name="文本框 1">
+            <a:extLst>
+              <a:ext uri="{FF2B5EF4-FFF2-40B4-BE49-F238E27FC236}">
+                <a16:creationId xmlns:a16="http://schemas.microsoft.com/office/drawing/2014/main" id="{A144EA9B-94A6-7024-8B93-CEE8C30E5A7C}"/>
+              </a:ext>
+            </a:extLst>
+          </p:cNvPr>
+          <p:cNvSpPr txBox="1"/>
+          <p:nvPr/>
+        </p:nvSpPr>
+        <p:spPr>
+          <a:xfrm>
+            <a:off x="1312986" y="1178168"/>
+            <a:ext cx="8833337" cy="923330"/>
+          </a:xfrm>
+          <a:prstGeom prst="rect">
+            <a:avLst/>
+          </a:prstGeom>
+          <a:noFill/>
+        </p:spPr>
+        <p:txBody>
+          <a:bodyPr wrap="square" rtlCol="0">
+            <a:spAutoFit/>
+          </a:bodyPr>
+          <a:lstStyle/>
+          <a:p>
+            <a:r>
+              <a:rPr lang="zh-CN" altLang="en-US" dirty="0"/>
+              <a:t>技术路线一：从今天起，开始尝试纪耀方的每周课后作业</a:t>
+            </a:r>
+            <a:endParaRPr lang="en-US" altLang="zh-CN" dirty="0"/>
+          </a:p>
+          <a:p>
+            <a:r>
+              <a:rPr lang="zh-CN" altLang="en-US" dirty="0"/>
+              <a:t>技术路线二：由倪驰明负责</a:t>
+            </a:r>
+            <a:endParaRPr lang="en-US" altLang="zh-CN" dirty="0"/>
+          </a:p>
+          <a:p>
+            <a:r>
+              <a:rPr lang="zh-CN" altLang="en-US" dirty="0"/>
+              <a:t>技术路线三：单独布置</a:t>
+            </a:r>
+            <a:endParaRPr lang="en-US" altLang="zh-CN" dirty="0"/>
+          </a:p>
+        </p:txBody>
+      </p:sp>
+    </p:spTree>
+    <p:extLst>
+      <p:ext uri="{BB962C8B-B14F-4D97-AF65-F5344CB8AC3E}">
+        <p14:creationId xmlns:p14="http://schemas.microsoft.com/office/powerpoint/2010/main" val="231266580"/>
+      </p:ext>
+    </p:extLst>
+  </p:cSld>
+  <p:clrMapOvr>
+    <a:masterClrMapping/>
+  </p:clrMapOvr>
+  <mc:AlternateContent xmlns:mc="http://schemas.openxmlformats.org/markup-compatibility/2006" xmlns:p14="http://schemas.microsoft.com/office/powerpoint/2010/main">
+    <mc:Choice Requires="p14">
+      <p:transition spd="med" p14:dur="700" advTm="5000">
+        <p:fade/>
+      </p:transition>
+    </mc:Choice>
+    <mc:Fallback xmlns="">
+      <p:transition spd="med" advTm="5000">
+        <p:fade/>
+      </p:transition>
+    </mc:Fallback>
+  </mc:AlternateContent>
+</p:sld>
+</file>
+
+<file path=ppt/slides/slide34.xml><?xml version="1.0" encoding="utf-8"?>
 <p:sld xmlns:a="http://schemas.openxmlformats.org/drawingml/2006/main" xmlns:r="http://schemas.openxmlformats.org/officeDocument/2006/relationships" xmlns:p="http://schemas.openxmlformats.org/presentationml/2006/main">
   <p:cSld>
     <p:spTree>
